--- a/기획서/2층 복도 기획.pptx
+++ b/기획서/2층 복도 기획.pptx
@@ -115,6 +115,11 @@
       </a:defRPr>
     </a:lvl9pPr>
   </p:defaultTextStyle>
+  <p:extLst>
+    <p:ext uri="{EFAFB233-063F-42B5-8137-9DF3F51BA10A}">
+      <p15:sldGuideLst xmlns:p15="http://schemas.microsoft.com/office/powerpoint/2012/main"/>
+    </p:ext>
+  </p:extLst>
 </p:presentation>
 </file>
 
@@ -3542,11 +3547,11 @@
             </a:r>
             <a:r>
               <a:rPr lang="en-US" altLang="ko-KR" dirty="0"/>
-              <a:t>[</a:t>
-            </a:r>
-            <a:r>
-              <a:rPr lang="ko-KR" altLang="en-US" dirty="0"/>
-              <a:t>진열장 눌렀을 때 컨셉 이미지</a:t>
+              <a:t>[2</a:t>
+            </a:r>
+            <a:r>
+              <a:rPr lang="ko-KR" altLang="en-US" dirty="0"/>
+              <a:t>층 오른쪽 복도 컨셉 이미지</a:t>
             </a:r>
             <a:r>
               <a:rPr lang="en-US" altLang="ko-KR" dirty="0"/>
@@ -3580,7 +3585,7 @@
         <p:spPr>
           <a:xfrm>
             <a:off x="5575635" y="3094400"/>
-            <a:ext cx="6027821" cy="2585323"/>
+            <a:ext cx="6027821" cy="3139321"/>
           </a:xfrm>
           <a:prstGeom prst="rect">
             <a:avLst/>
@@ -3677,6 +3682,21 @@
               <a:rPr lang="ko-KR" altLang="en-US" dirty="0"/>
               <a:t>오른쪽 아래 제미나이 마크 제거</a:t>
             </a:r>
+            <a:endParaRPr lang="en-US" altLang="ko-KR" dirty="0"/>
+          </a:p>
+          <a:p>
+            <a:endParaRPr lang="en-US" altLang="ko-KR" dirty="0"/>
+          </a:p>
+          <a:p>
+            <a:r>
+              <a:rPr lang="en-US" altLang="ko-KR" dirty="0"/>
+              <a:t>-</a:t>
+            </a:r>
+            <a:r>
+              <a:rPr lang="ko-KR" altLang="en-US" dirty="0"/>
+              <a:t>돌아오는 방향 만들기</a:t>
+            </a:r>
+            <a:endParaRPr lang="en-US" altLang="ko-KR" dirty="0"/>
           </a:p>
         </p:txBody>
       </p:sp>
@@ -5274,7 +5294,7 @@
         </p:spPr>
         <p:txBody>
           <a:bodyPr>
-            <a:normAutofit lnSpcReduction="10000"/>
+            <a:normAutofit fontScale="77500" lnSpcReduction="20000"/>
           </a:bodyPr>
           <a:lstStyle/>
           <a:p>
@@ -5464,6 +5484,53 @@
             <a:r>
               <a:rPr lang="ko-KR" altLang="en-US" sz="1800" dirty="0"/>
               <a:t>오른쪽 아래 제미나이 마크 삭제</a:t>
+            </a:r>
+            <a:endParaRPr lang="en-US" altLang="ko-KR" sz="1800" dirty="0"/>
+          </a:p>
+          <a:p>
+            <a:pPr marL="0" indent="0">
+              <a:buNone/>
+            </a:pPr>
+            <a:r>
+              <a:rPr lang="en-US" altLang="ko-KR" sz="1800" dirty="0"/>
+              <a:t>				   </a:t>
+            </a:r>
+          </a:p>
+          <a:p>
+            <a:pPr marL="0" indent="0">
+              <a:buNone/>
+            </a:pPr>
+            <a:r>
+              <a:rPr lang="en-US" altLang="ko-KR" sz="1800" dirty="0"/>
+              <a:t>				     - </a:t>
+            </a:r>
+            <a:r>
+              <a:rPr lang="ko-KR" altLang="en-US" sz="1800" dirty="0"/>
+              <a:t>돌아오는 방향 만들기</a:t>
+            </a:r>
+            <a:endParaRPr lang="en-US" altLang="ko-KR" sz="1800" dirty="0"/>
+          </a:p>
+          <a:p>
+            <a:pPr marL="0" indent="0">
+              <a:buNone/>
+            </a:pPr>
+            <a:endParaRPr lang="en-US" altLang="ko-KR" sz="1800" dirty="0"/>
+          </a:p>
+          <a:p>
+            <a:pPr marL="0" indent="0">
+              <a:buNone/>
+            </a:pPr>
+            <a:r>
+              <a:rPr lang="en-US" altLang="ko-KR" sz="1800" dirty="0"/>
+              <a:t>				     -</a:t>
+            </a:r>
+            <a:r>
+              <a:rPr lang="ko-KR" altLang="en-US" sz="1800" dirty="0" err="1"/>
+              <a:t>엑자</a:t>
+            </a:r>
+            <a:r>
+              <a:rPr lang="ko-KR" altLang="en-US" sz="1800" dirty="0"/>
+              <a:t> 붉은색 박스 위치로 밀기</a:t>
             </a:r>
             <a:endParaRPr lang="en-US" altLang="ko-KR" sz="1800" dirty="0"/>
           </a:p>
@@ -5505,6 +5572,59 @@
           </a:prstGeom>
         </p:spPr>
       </p:pic>
+      <p:sp>
+        <p:nvSpPr>
+          <p:cNvPr id="3" name="액자 2">
+            <a:extLst>
+              <a:ext uri="{FF2B5EF4-FFF2-40B4-BE49-F238E27FC236}">
+                <a16:creationId xmlns:a16="http://schemas.microsoft.com/office/drawing/2014/main" id="{34F8D2E7-E132-4CC0-BAB4-4FBE64CFF331}"/>
+              </a:ext>
+            </a:extLst>
+          </p:cNvPr>
+          <p:cNvSpPr/>
+          <p:nvPr/>
+        </p:nvSpPr>
+        <p:spPr>
+          <a:xfrm>
+            <a:off x="2838616" y="3562184"/>
+            <a:ext cx="389614" cy="437322"/>
+          </a:xfrm>
+          <a:prstGeom prst="frame">
+            <a:avLst/>
+          </a:prstGeom>
+          <a:solidFill>
+            <a:srgbClr val="FF0000"/>
+          </a:solidFill>
+        </p:spPr>
+        <p:style>
+          <a:lnRef idx="2">
+            <a:schemeClr val="accent1">
+              <a:shade val="50000"/>
+            </a:schemeClr>
+          </a:lnRef>
+          <a:fillRef idx="1">
+            <a:schemeClr val="accent1"/>
+          </a:fillRef>
+          <a:effectRef idx="0">
+            <a:schemeClr val="accent1"/>
+          </a:effectRef>
+          <a:fontRef idx="minor">
+            <a:schemeClr val="lt1"/>
+          </a:fontRef>
+        </p:style>
+        <p:txBody>
+          <a:bodyPr rtlCol="0" anchor="ctr"/>
+          <a:lstStyle/>
+          <a:p>
+            <a:pPr algn="ctr"/>
+            <a:endParaRPr lang="ko-KR" altLang="en-US">
+              <a:solidFill>
+                <a:schemeClr val="tx1"/>
+              </a:solidFill>
+            </a:endParaRPr>
+          </a:p>
+        </p:txBody>
+      </p:sp>
     </p:spTree>
     <p:extLst>
       <p:ext uri="{BB962C8B-B14F-4D97-AF65-F5344CB8AC3E}">

--- a/기획서/2층 복도 기획.pptx
+++ b/기획서/2층 복도 기획.pptx
@@ -270,7 +270,7 @@
           <a:p>
             <a:fld id="{EC0F3CC6-F86E-45E7-A0E6-9968FF29A2C2}" type="datetimeFigureOut">
               <a:rPr lang="ko-KR" altLang="en-US" smtClean="0"/>
-              <a:t>2025-10-28</a:t>
+              <a:t>2026-03-28</a:t>
             </a:fld>
             <a:endParaRPr lang="ko-KR" altLang="en-US"/>
           </a:p>
@@ -468,7 +468,7 @@
           <a:p>
             <a:fld id="{EC0F3CC6-F86E-45E7-A0E6-9968FF29A2C2}" type="datetimeFigureOut">
               <a:rPr lang="ko-KR" altLang="en-US" smtClean="0"/>
-              <a:t>2025-10-28</a:t>
+              <a:t>2026-03-28</a:t>
             </a:fld>
             <a:endParaRPr lang="ko-KR" altLang="en-US"/>
           </a:p>
@@ -676,7 +676,7 @@
           <a:p>
             <a:fld id="{EC0F3CC6-F86E-45E7-A0E6-9968FF29A2C2}" type="datetimeFigureOut">
               <a:rPr lang="ko-KR" altLang="en-US" smtClean="0"/>
-              <a:t>2025-10-28</a:t>
+              <a:t>2026-03-28</a:t>
             </a:fld>
             <a:endParaRPr lang="ko-KR" altLang="en-US"/>
           </a:p>
@@ -874,7 +874,7 @@
           <a:p>
             <a:fld id="{EC0F3CC6-F86E-45E7-A0E6-9968FF29A2C2}" type="datetimeFigureOut">
               <a:rPr lang="ko-KR" altLang="en-US" smtClean="0"/>
-              <a:t>2025-10-28</a:t>
+              <a:t>2026-03-28</a:t>
             </a:fld>
             <a:endParaRPr lang="ko-KR" altLang="en-US"/>
           </a:p>
@@ -1149,7 +1149,7 @@
           <a:p>
             <a:fld id="{EC0F3CC6-F86E-45E7-A0E6-9968FF29A2C2}" type="datetimeFigureOut">
               <a:rPr lang="ko-KR" altLang="en-US" smtClean="0"/>
-              <a:t>2025-10-28</a:t>
+              <a:t>2026-03-28</a:t>
             </a:fld>
             <a:endParaRPr lang="ko-KR" altLang="en-US"/>
           </a:p>
@@ -1414,7 +1414,7 @@
           <a:p>
             <a:fld id="{EC0F3CC6-F86E-45E7-A0E6-9968FF29A2C2}" type="datetimeFigureOut">
               <a:rPr lang="ko-KR" altLang="en-US" smtClean="0"/>
-              <a:t>2025-10-28</a:t>
+              <a:t>2026-03-28</a:t>
             </a:fld>
             <a:endParaRPr lang="ko-KR" altLang="en-US"/>
           </a:p>
@@ -1826,7 +1826,7 @@
           <a:p>
             <a:fld id="{EC0F3CC6-F86E-45E7-A0E6-9968FF29A2C2}" type="datetimeFigureOut">
               <a:rPr lang="ko-KR" altLang="en-US" smtClean="0"/>
-              <a:t>2025-10-28</a:t>
+              <a:t>2026-03-28</a:t>
             </a:fld>
             <a:endParaRPr lang="ko-KR" altLang="en-US"/>
           </a:p>
@@ -1967,7 +1967,7 @@
           <a:p>
             <a:fld id="{EC0F3CC6-F86E-45E7-A0E6-9968FF29A2C2}" type="datetimeFigureOut">
               <a:rPr lang="ko-KR" altLang="en-US" smtClean="0"/>
-              <a:t>2025-10-28</a:t>
+              <a:t>2026-03-28</a:t>
             </a:fld>
             <a:endParaRPr lang="ko-KR" altLang="en-US"/>
           </a:p>
@@ -2080,7 +2080,7 @@
           <a:p>
             <a:fld id="{EC0F3CC6-F86E-45E7-A0E6-9968FF29A2C2}" type="datetimeFigureOut">
               <a:rPr lang="ko-KR" altLang="en-US" smtClean="0"/>
-              <a:t>2025-10-28</a:t>
+              <a:t>2026-03-28</a:t>
             </a:fld>
             <a:endParaRPr lang="ko-KR" altLang="en-US"/>
           </a:p>
@@ -2391,7 +2391,7 @@
           <a:p>
             <a:fld id="{EC0F3CC6-F86E-45E7-A0E6-9968FF29A2C2}" type="datetimeFigureOut">
               <a:rPr lang="ko-KR" altLang="en-US" smtClean="0"/>
-              <a:t>2025-10-28</a:t>
+              <a:t>2026-03-28</a:t>
             </a:fld>
             <a:endParaRPr lang="ko-KR" altLang="en-US"/>
           </a:p>
@@ -2679,7 +2679,7 @@
           <a:p>
             <a:fld id="{EC0F3CC6-F86E-45E7-A0E6-9968FF29A2C2}" type="datetimeFigureOut">
               <a:rPr lang="ko-KR" altLang="en-US" smtClean="0"/>
-              <a:t>2025-10-28</a:t>
+              <a:t>2026-03-28</a:t>
             </a:fld>
             <a:endParaRPr lang="ko-KR" altLang="en-US"/>
           </a:p>
@@ -2920,7 +2920,7 @@
           <a:p>
             <a:fld id="{EC0F3CC6-F86E-45E7-A0E6-9968FF29A2C2}" type="datetimeFigureOut">
               <a:rPr lang="ko-KR" altLang="en-US" smtClean="0"/>
-              <a:t>2025-10-28</a:t>
+              <a:t>2026-03-28</a:t>
             </a:fld>
             <a:endParaRPr lang="ko-KR" altLang="en-US"/>
           </a:p>
